--- a/docs/content/correlation_linear_models/correlation_linear_models_lecture.pptx
+++ b/docs/content/correlation_linear_models/correlation_linear_models_lecture.pptx
@@ -45,6 +45,8 @@
     <p:sldId id="293" r:id="rId39"/>
     <p:sldId id="294" r:id="rId40"/>
     <p:sldId id="295" r:id="rId41"/>
+    <p:sldId id="296" r:id="rId42"/>
+    <p:sldId id="297" r:id="rId43"/>
   </p:sldIdLst>
   <p:sldSz cx="9144000" cy="5143500" type="screen16x9"/>
   <p:notesSz cx="6858000" cy="9144000"/>
@@ -3576,7 +3578,7 @@
       </mc:AlternateContent>
       <p:pic>
         <p:nvPicPr>
-          <p:cNvPr descr="correlation_linear_models_lecture_files/figure-pptx/unnamed-chunk-6-1.png" id="0" name="Picture 1"/>
+          <p:cNvPr descr="correlation_linear_models_lecture_files/figure-pptx/correlation-linear-models-06-1.png" id="0" name="Picture 1"/>
           <p:cNvPicPr>
             <a:picLocks noGrp="1" noChangeAspect="1"/>
           </p:cNvPicPr>
@@ -3963,7 +3965,7 @@
       </p:sp>
       <p:pic>
         <p:nvPicPr>
-          <p:cNvPr descr="correlation_linear_models_lecture_files/figure-pptx/unnamed-chunk-8-1.png" id="0" name="Picture 1"/>
+          <p:cNvPr descr="correlation_linear_models_lecture_files/figure-pptx/correlation-linear-models-08-1.png" id="0" name="Picture 1"/>
           <p:cNvPicPr>
             <a:picLocks noGrp="1" noChangeAspect="1"/>
           </p:cNvPicPr>
@@ -4130,7 +4132,7 @@
       </p:sp>
       <p:pic>
         <p:nvPicPr>
-          <p:cNvPr descr="correlation_linear_models_lecture_files/figure-pptx/unnamed-chunk-9-1.png" id="0" name="Picture 1"/>
+          <p:cNvPr descr="correlation_linear_models_lecture_files/figure-pptx/correlation-linear-models-09-1.png" id="0" name="Picture 1"/>
           <p:cNvPicPr>
             <a:picLocks noGrp="1" noChangeAspect="1"/>
           </p:cNvPicPr>
@@ -4523,7 +4525,7 @@
       </p:sp>
       <p:pic>
         <p:nvPicPr>
-          <p:cNvPr descr="correlation_linear_models_lecture_files/figure-pptx/unnamed-chunk-11-1.png" id="0" name="Picture 1"/>
+          <p:cNvPr descr="correlation_linear_models_lecture_files/figure-pptx/correlation-linear-models-11-1.png" id="0" name="Picture 1"/>
           <p:cNvPicPr>
             <a:picLocks noGrp="1" noChangeAspect="1"/>
           </p:cNvPicPr>
@@ -5164,7 +5166,7 @@
       </mc:AlternateContent>
       <p:pic>
         <p:nvPicPr>
-          <p:cNvPr descr="correlation_linear_models_lecture_files/figure-pptx/unnamed-chunk-12-1.png" id="0" name="Picture 1"/>
+          <p:cNvPr descr="correlation_linear_models_lecture_files/figure-pptx/correlation-linear-models-12-1.png" id="0" name="Picture 1"/>
           <p:cNvPicPr>
             <a:picLocks noGrp="1" noChangeAspect="1"/>
           </p:cNvPicPr>
@@ -5328,7 +5330,7 @@
       </p:sp>
       <p:pic>
         <p:nvPicPr>
-          <p:cNvPr descr="correlation_linear_models_lecture_files/figure-pptx/unnamed-chunk-2-1.png" id="0" name="Picture 1"/>
+          <p:cNvPr descr="correlation_linear_models_lecture_files/figure-pptx/correlation-linear-models-02-1.png" id="0" name="Picture 1"/>
           <p:cNvPicPr>
             <a:picLocks noGrp="1" noChangeAspect="1"/>
           </p:cNvPicPr>
@@ -5545,7 +5547,7 @@
       </mc:AlternateContent>
       <p:pic>
         <p:nvPicPr>
-          <p:cNvPr descr="correlation_linear_models_lecture_files/figure-pptx/unnamed-chunk-13-1.png" id="0" name="Picture 1"/>
+          <p:cNvPr descr="correlation_linear_models_lecture_files/figure-pptx/correlation-linear-models-13-1.png" id="0" name="Picture 1"/>
           <p:cNvPicPr>
             <a:picLocks noGrp="1" noChangeAspect="1"/>
           </p:cNvPicPr>
@@ -6350,7 +6352,7 @@
       </mc:AlternateContent>
       <p:pic>
         <p:nvPicPr>
-          <p:cNvPr descr="correlation_linear_models_lecture_files/figure-pptx/unnamed-chunk-15-1.png" id="0" name="Picture 1"/>
+          <p:cNvPr descr="correlation_linear_models_lecture_files/figure-pptx/correlation-linear-models-15-1.png" id="0" name="Picture 1"/>
           <p:cNvPicPr>
             <a:picLocks noGrp="1" noChangeAspect="1"/>
           </p:cNvPicPr>
@@ -6611,7 +6613,7 @@
       </mc:AlternateContent>
       <p:pic>
         <p:nvPicPr>
-          <p:cNvPr descr="correlation_linear_models_lecture_files/figure-pptx/unnamed-chunk-16-1.png" id="0" name="Picture 1"/>
+          <p:cNvPr descr="correlation_linear_models_lecture_files/figure-pptx/correlation-linear-models-16-1.png" id="0" name="Picture 1"/>
           <p:cNvPicPr>
             <a:picLocks noGrp="1" noChangeAspect="1"/>
           </p:cNvPicPr>
@@ -6932,7 +6934,7 @@
       </p:sp>
       <p:pic>
         <p:nvPicPr>
-          <p:cNvPr descr="correlation_linear_models_lecture_files/figure-pptx/unnamed-chunk-18-1.png" id="0" name="Picture 1"/>
+          <p:cNvPr descr="correlation_linear_models_lecture_files/figure-pptx/correlation-linear-models-18-1.png" id="0" name="Picture 1"/>
           <p:cNvPicPr>
             <a:picLocks noGrp="1" noChangeAspect="1"/>
           </p:cNvPicPr>
@@ -7325,16 +7327,15 @@
                 </a:pPr>
                 <a:r>
                   <a:rPr/>
-                  <a:t>Linear regression has four key assumptions: linearity, independence, homoscedasticity, and normality.</a:t>
-                </a:r>
-              </a:p>
-              <a:p>
-                <a:pPr lvl="0" indent="0" marL="0">
-                  <a:buNone/>
-                </a:pPr>
+                  <a:t>Every assumption check from here on is about the </a:t>
+                </a:r>
+                <a:r>
+                  <a:rPr b="1"/>
+                  <a:t>residuals</a:t>
+                </a:r>
                 <a:r>
                   <a:rPr/>
-                  <a:t>Let’s check these assumptions for the lion regression model.</a:t>
+                  <a:t>, not the raw data. That is the single most common mix-up in regression.</a:t>
                 </a:r>
               </a:p>
               <a:p>
@@ -7675,8 +7676,12 @@
               <a:buNone/>
             </a:pPr>
             <a:r>
-              <a:rPr/>
-              <a:t>Linear regression has four key assumptions: linearity, independence, homoscedasticity, and normality.</a:t>
+              <a:rPr b="1"/>
+              <a:t>Residuals vs. fitted</a:t>
+            </a:r>
+            <a:r>
+              <a:rPr/>
+              <a:t> is the linearity check.</a:t>
             </a:r>
           </a:p>
           <a:p>
@@ -7684,23 +7689,57 @@
               <a:buNone/>
             </a:pPr>
             <a:r>
-              <a:rPr/>
-              <a:t>Let’s check these assumptions for the lion regression model. </a:t>
-            </a:r>
-            <a:r>
               <a:rPr b="1"/>
-              <a:t>Linearity</a:t>
-            </a:r>
-            <a:r>
-              <a:rPr/>
-              <a:t> — how does this plot work?</a:t>
+              <a:t>What you want:</a:t>
+            </a:r>
+            <a:r>
+              <a:rPr/>
+              <a:t> a shapeless cloud, scattered evenly above and below the horizontal line at zero.</a:t>
+            </a:r>
+          </a:p>
+          <a:p>
+            <a:pPr lvl="0" indent="0" marL="0">
+              <a:buNone/>
+            </a:pPr>
+            <a:r>
+              <a:rPr b="1"/>
+              <a:t>What is a problem:</a:t>
+            </a:r>
+            <a:r>
+              <a:rPr/>
+              <a:t> any </a:t>
+            </a:r>
+            <a:r>
+              <a:rPr i="1"/>
+              <a:t>curve</a:t>
+            </a:r>
+            <a:r>
+              <a:rPr/>
+              <a:t> in the red trend line. A U-shape or arch means the relationship is not straight, and a straight-line model is the wrong shape for the data.</a:t>
+            </a:r>
+          </a:p>
+          <a:p>
+            <a:pPr lvl="0" indent="0" marL="0">
+              <a:buNone/>
+            </a:pPr>
+            <a:r>
+              <a:rPr/>
+              <a:t>The plot also doubles as a </a:t>
+            </a:r>
+            <a:r>
+              <a:rPr b="1"/>
+              <a:t>homoscedasticity</a:t>
+            </a:r>
+            <a:r>
+              <a:rPr/>
+              <a:t> check — if the cloud fans out or funnels in as you move right, the variance is not constant.</a:t>
             </a:r>
           </a:p>
         </p:txBody>
       </p:sp>
       <p:pic>
         <p:nvPicPr>
-          <p:cNvPr descr="correlation_linear_models_lecture_files/figure-pptx/unnamed-chunk-19-1.png" id="0" name="Picture 1"/>
+          <p:cNvPr descr="correlation_linear_models_lecture_files/figure-pptx/correlation-linear-models-19-1.png" id="0" name="Picture 1"/>
           <p:cNvPicPr>
             <a:picLocks noGrp="1" noChangeAspect="1"/>
           </p:cNvPicPr>
@@ -7854,8 +7893,12 @@
               <a:buNone/>
             </a:pPr>
             <a:r>
-              <a:rPr/>
-              <a:t>Linear regression has four key assumptions: linearity, independence, homoscedasticity, and normality.</a:t>
+              <a:rPr b="1"/>
+              <a:t>The QQ plot</a:t>
+            </a:r>
+            <a:r>
+              <a:rPr/>
+              <a:t> compares your residuals to what perfectly normal residuals would look like.</a:t>
             </a:r>
           </a:p>
           <a:p>
@@ -7863,15 +7906,59 @@
               <a:buNone/>
             </a:pPr>
             <a:r>
-              <a:rPr/>
-              <a:t>Let’s check these assumptions for the lion regression model.</a:t>
+              <a:rPr b="1"/>
+              <a:t>What you want:</a:t>
+            </a:r>
+            <a:r>
+              <a:rPr/>
+              <a:t> points hugging the diagonal line.</a:t>
+            </a:r>
+          </a:p>
+          <a:p>
+            <a:pPr lvl="0" indent="0" marL="0">
+              <a:buNone/>
+            </a:pPr>
+            <a:r>
+              <a:rPr b="1"/>
+              <a:t>What is a problem:</a:t>
+            </a:r>
+            <a:r>
+              <a:rPr/>
+              <a:t> systematic curvature, or points peeling away at the ends — the tails are where non-normality shows up first, and the tails are what p-values depend on.</a:t>
+            </a:r>
+          </a:p>
+          <a:p>
+            <a:pPr lvl="0" indent="0" marL="0">
+              <a:buNone/>
+            </a:pPr>
+            <a:r>
+              <a:rPr/>
+              <a:t>Note we check the residuals here, </a:t>
+            </a:r>
+            <a:r>
+              <a:rPr b="1"/>
+              <a:t>not</a:t>
+            </a:r>
+            <a:r>
+              <a:rPr/>
+              <a:t> </a:t>
+            </a:r>
+            <a:r>
+              <a:rPr>
+                <a:latin typeface="Courier"/>
+              </a:rPr>
+              <a:t>age_years</a:t>
+            </a:r>
+            <a:r>
+              <a:rPr/>
+              <a:t> itself. The raw ages are right-skewed; that is allowed. It is the residuals that must behave.</a:t>
             </a:r>
           </a:p>
         </p:txBody>
       </p:sp>
       <p:pic>
         <p:nvPicPr>
-          <p:cNvPr descr="correlation_linear_models_lecture_files/figure-pptx/unnamed-chunk-20-1.png" id="0" name="Picture 1"/>
+          <p:cNvPr descr="correlation_linear_models_lecture_files/figure-pptx/correlation-linear-models-20-1.png" id="0" name="Picture 1"/>
           <p:cNvPicPr>
             <a:picLocks noGrp="1" noChangeAspect="1"/>
           </p:cNvPicPr>
@@ -7974,7 +8061,48 @@
             </a:pPr>
             <a:r>
               <a:rPr/>
-              <a:t>Linear regression has four key assumptions: linearity, independence, homoscedasticity, and normality.</a:t>
+              <a:t>The formal test to go with the QQ plot. Note what goes inside it:</a:t>
+            </a:r>
+          </a:p>
+          <a:p>
+            <a:pPr lvl="0" indent="0">
+              <a:buNone/>
+            </a:pPr>
+            <a:r>
+              <a:rPr>
+                <a:solidFill>
+                  <a:srgbClr val="4758AB"/>
+                </a:solidFill>
+                <a:latin typeface="Courier"/>
+              </a:rPr>
+              <a:t>shapiro.test</a:t>
+            </a:r>
+            <a:r>
+              <a:rPr>
+                <a:solidFill>
+                  <a:srgbClr val="003B4F"/>
+                </a:solidFill>
+                <a:latin typeface="Courier"/>
+              </a:rPr>
+              <a:t>(</a:t>
+            </a:r>
+            <a:r>
+              <a:rPr>
+                <a:solidFill>
+                  <a:srgbClr val="4758AB"/>
+                </a:solidFill>
+                <a:latin typeface="Courier"/>
+              </a:rPr>
+              <a:t>residuals</a:t>
+            </a:r>
+            <a:r>
+              <a:rPr>
+                <a:solidFill>
+                  <a:srgbClr val="003B4F"/>
+                </a:solidFill>
+                <a:latin typeface="Courier"/>
+              </a:rPr>
+              <a:t>(lion_model))</a:t>
             </a:r>
           </a:p>
           <a:p>
@@ -7982,8 +8110,72 @@
               <a:buNone/>
             </a:pPr>
             <a:r>
-              <a:rPr/>
-              <a:t>Let’s check these assumptions for the lion regression model.</a:t>
+              <a:rPr b="1">
+                <a:latin typeface="Courier"/>
+              </a:rPr>
+              <a:t>residuals(model)</a:t>
+            </a:r>
+            <a:r>
+              <a:rPr/>
+              <a:t> — not </a:t>
+            </a:r>
+            <a:r>
+              <a:rPr>
+                <a:latin typeface="Courier"/>
+              </a:rPr>
+              <a:t>lion_data$age_years</a:t>
+            </a:r>
+            <a:r>
+              <a:rPr/>
+              <a:t>. Testing the raw response is a different (and usually wrong) question.</a:t>
+            </a:r>
+          </a:p>
+          <a:p>
+            <a:pPr lvl="0" indent="0" marL="0">
+              <a:buNone/>
+            </a:pPr>
+            <a:r>
+              <a:rPr b="1"/>
+              <a:t>H₀ is “the residuals ARE normal”,</a:t>
+            </a:r>
+            <a:r>
+              <a:rPr/>
+              <a:t> so here a </a:t>
+            </a:r>
+            <a:r>
+              <a:rPr b="1"/>
+              <a:t>large</a:t>
+            </a:r>
+            <a:r>
+              <a:rPr/>
+              <a:t> p-value is the good outcome — the same backwards logic as Levene’s test.</a:t>
+            </a:r>
+          </a:p>
+          <a:p>
+            <a:pPr lvl="0" indent="0" marL="1270000">
+              <a:buNone/>
+            </a:pPr>
+            <a:r>
+              <a:rPr sz="2000" b="1"/>
+              <a:t>Warning</a:t>
+            </a:r>
+          </a:p>
+          <a:p>
+            <a:pPr lvl="0" indent="0" marL="1270000">
+              <a:buNone/>
+            </a:pPr>
+            <a:r>
+              <a:rPr sz="2000" b="1"/>
+              <a:t>⚠️ Do not let this test overrule your eyes</a:t>
+            </a:r>
+          </a:p>
+          <a:p>
+            <a:pPr lvl="0" indent="0" marL="1270000">
+              <a:buNone/>
+            </a:pPr>
+            <a:r>
+              <a:rPr sz="2000"/>
+              <a:t>At small n it has almost no power to detect a problem; at large n it flags departures too small to matter. Read the QQ plot first and use the test to support it, not replace it.</a:t>
             </a:r>
           </a:p>
         </p:txBody>
@@ -8136,7 +8328,7 @@
       </p:sp>
       <p:pic>
         <p:nvPicPr>
-          <p:cNvPr descr="correlation_linear_models_lecture_files/figure-pptx/unnamed-chunk-22-1.png" id="0" name="Picture 1"/>
+          <p:cNvPr descr="correlation_linear_models_lecture_files/figure-pptx/correlation-linear-models-22-1.png" id="0" name="Picture 1"/>
           <p:cNvPicPr>
             <a:picLocks noGrp="1" noChangeAspect="1"/>
           </p:cNvPicPr>
@@ -10544,6 +10736,627 @@
 </p:sld>
 </file>
 
+<file path=ppt/slides/slide41.xml><?xml version="1.0" encoding="utf-8"?>
+<p:sld xmlns:a="http://schemas.openxmlformats.org/drawingml/2006/main" xmlns:r="http://schemas.openxmlformats.org/officeDocument/2006/relationships" xmlns:p="http://schemas.openxmlformats.org/presentationml/2006/main">
+  <p:cSld>
+    <p:spTree>
+      <p:nvGrpSpPr>
+        <p:cNvPr id="1" name=""/>
+        <p:cNvGrpSpPr/>
+        <p:nvPr/>
+      </p:nvGrpSpPr>
+      <p:grpSpPr>
+        <a:xfrm>
+          <a:off x="0" y="0"/>
+          <a:ext cx="0" cy="0"/>
+          <a:chOff x="0" y="0"/>
+          <a:chExt cx="0" cy="0"/>
+        </a:xfrm>
+      </p:grpSpPr>
+      <p:sp>
+        <p:nvSpPr>
+          <p:cNvPr id="2" name="Title 1"/>
+          <p:cNvSpPr>
+            <a:spLocks noGrp="1"/>
+          </p:cNvSpPr>
+          <p:nvPr>
+            <p:ph type="title"/>
+          </p:nvPr>
+        </p:nvSpPr>
+        <p:spPr>
+          <a:xfrm>
+            <a:off x="0" y="0"/>
+            <a:ext cx="9144000" cy="602780"/>
+          </a:xfrm>
+          <a:solidFill>
+            <a:srgbClr val="70121D"/>
+          </a:solidFill>
+        </p:spPr>
+        <p:txBody>
+          <a:bodyPr/>
+          <a:lstStyle/>
+          <a:p>
+            <a:pPr lvl="0" indent="0" marL="0">
+              <a:buNone/>
+            </a:pPr>
+            <a:r>
+              <a:rPr/>
+              <a:t>Wrap-up</a:t>
+            </a:r>
+          </a:p>
+        </p:txBody>
+      </p:sp>
+      <mc:AlternateContent xmlns:mc="http://schemas.openxmlformats.org/markup-compatibility/2006">
+        <mc:Choice xmlns:a14="http://schemas.microsoft.com/office/drawing/2010/main" Requires="a14">
+          <p:sp>
+            <p:nvSpPr>
+              <p:cNvPr id="3" name="Content Placeholder 2"/>
+              <p:cNvSpPr>
+                <a:spLocks noGrp="1"/>
+              </p:cNvSpPr>
+              <p:nvPr>
+                <p:ph idx="1" sz="half"/>
+              </p:nvPr>
+            </p:nvSpPr>
+            <p:spPr/>
+            <p:txBody>
+              <a:bodyPr/>
+              <a:lstStyle/>
+              <a:p>
+                <a:pPr lvl="0" indent="0" marL="0">
+                  <a:buNone/>
+                </a:pPr>
+                <a:r>
+                  <a:rPr/>
+                  <a:t>Today you:</a:t>
+                </a:r>
+              </a:p>
+              <a:p>
+                <a:pPr lvl="0"/>
+                <a:r>
+                  <a:rPr/>
+                  <a:t>Separated </a:t>
+                </a:r>
+                <a:r>
+                  <a:rPr b="1"/>
+                  <a:t>correlation</a:t>
+                </a:r>
+                <a:r>
+                  <a:rPr/>
+                  <a:t> (how tightly two variables move together) from </a:t>
+                </a:r>
+                <a:r>
+                  <a:rPr b="1"/>
+                  <a:t>regression</a:t>
+                </a:r>
+                <a:r>
+                  <a:rPr/>
+                  <a:t> (an equation predicting Y from X) — and saw that neither one earns you causation</a:t>
+                </a:r>
+              </a:p>
+              <a:p>
+                <a:pPr lvl="0"/>
+                <a:r>
+                  <a:rPr/>
+                  <a:t>Computed and interpreted </a:t>
+                </a:r>
+                <a:r>
+                  <a:rPr b="1"/>
+                  <a:t>Pearson’s r</a:t>
+                </a:r>
+                <a:r>
+                  <a:rPr/>
+                  <a:t>, squared it to get the variance explained, and tested it with </a:t>
+                </a:r>
+                <a:r>
+                  <a:rPr>
+                    <a:latin typeface="Courier"/>
+                  </a:rPr>
+                  <a:t>cor.test()</a:t>
+                </a:r>
+              </a:p>
+              <a:p>
+                <a:pPr lvl="0"/>
+                <a:r>
+                  <a:rPr/>
+                  <a:t>Switched to </a:t>
+                </a:r>
+                <a:r>
+                  <a:rPr b="1"/>
+                  <a:t>Spearman’s ρ</a:t>
+                </a:r>
+                <a:r>
+                  <a:rPr/>
+                  <a:t> when the normality assumption failed</a:t>
+                </a:r>
+              </a:p>
+              <a:p>
+                <a:pPr lvl="0"/>
+                <a:r>
+                  <a:rPr/>
+                  <a:t>Fitted a straight line with </a:t>
+                </a:r>
+                <a:r>
+                  <a:rPr>
+                    <a:latin typeface="Courier"/>
+                  </a:rPr>
+                  <a:t>lm()</a:t>
+                </a:r>
+                <a:r>
+                  <a:rPr/>
+                  <a:t>, and read its </a:t>
+                </a:r>
+                <a:r>
+                  <a:rPr b="1"/>
+                  <a:t>slope</a:t>
+                </a:r>
+                <a:r>
+                  <a:rPr/>
+                  <a:t> and </a:t>
+                </a:r>
+                <a:r>
+                  <a:rPr b="1"/>
+                  <a:t>intercept</a:t>
+                </a:r>
+                <a:r>
+                  <a:rPr/>
+                  <a:t> as biology, not just numbers</a:t>
+                </a:r>
+              </a:p>
+              <a:p>
+                <a:pPr lvl="0"/>
+                <a:r>
+                  <a:rPr/>
+                  <a:t>Checked all four regression assumptions </a:t>
+                </a:r>
+                <a:r>
+                  <a:rPr b="1"/>
+                  <a:t>on the residuals</a:t>
+                </a:r>
+                <a:r>
+                  <a:rPr/>
+                  <a:t> — residuals vs. fitted, QQ plot, Shapiro-Wilk</a:t>
+                </a:r>
+              </a:p>
+              <a:p>
+                <a:pPr lvl="0"/>
+                <a:r>
+                  <a:rPr/>
+                  <a:t>Partitioned the variance into </a:t>
+                </a:r>
+                <a14:m>
+                  <m:oMath xmlns:m="http://schemas.openxmlformats.org/officeDocument/2006/math">
+                    <m:r>
+                      <m:t>S</m:t>
+                    </m:r>
+                    <m:sSub>
+                      <m:e>
+                        <m:r>
+                          <m:t>S</m:t>
+                        </m:r>
+                      </m:e>
+                      <m:sub>
+                        <m:r>
+                          <m:t>r</m:t>
+                        </m:r>
+                        <m:r>
+                          <m:t>e</m:t>
+                        </m:r>
+                        <m:r>
+                          <m:t>g</m:t>
+                        </m:r>
+                        <m:r>
+                          <m:t>r</m:t>
+                        </m:r>
+                        <m:r>
+                          <m:t>e</m:t>
+                        </m:r>
+                        <m:r>
+                          <m:t>s</m:t>
+                        </m:r>
+                        <m:r>
+                          <m:t>s</m:t>
+                        </m:r>
+                        <m:r>
+                          <m:t>i</m:t>
+                        </m:r>
+                        <m:r>
+                          <m:t>o</m:t>
+                        </m:r>
+                        <m:r>
+                          <m:t>n</m:t>
+                        </m:r>
+                      </m:sub>
+                    </m:sSub>
+                  </m:oMath>
+                </a14:m>
+                <a:r>
+                  <a:rPr/>
+                  <a:t> and </a:t>
+                </a:r>
+                <a14:m>
+                  <m:oMath xmlns:m="http://schemas.openxmlformats.org/officeDocument/2006/math">
+                    <m:r>
+                      <m:t>S</m:t>
+                    </m:r>
+                    <m:sSub>
+                      <m:e>
+                        <m:r>
+                          <m:t>S</m:t>
+                        </m:r>
+                      </m:e>
+                      <m:sub>
+                        <m:r>
+                          <m:t>r</m:t>
+                        </m:r>
+                        <m:r>
+                          <m:t>e</m:t>
+                        </m:r>
+                        <m:r>
+                          <m:t>s</m:t>
+                        </m:r>
+                        <m:r>
+                          <m:t>i</m:t>
+                        </m:r>
+                        <m:r>
+                          <m:t>d</m:t>
+                        </m:r>
+                        <m:r>
+                          <m:t>u</m:t>
+                        </m:r>
+                        <m:r>
+                          <m:t>a</m:t>
+                        </m:r>
+                        <m:r>
+                          <m:t>l</m:t>
+                        </m:r>
+                      </m:sub>
+                    </m:sSub>
+                  </m:oMath>
+                </a14:m>
+                <a:r>
+                  <a:rPr/>
+                  <a:t>, and turned those into mean squares and an F-ratio</a:t>
+                </a:r>
+              </a:p>
+              <a:p>
+                <a:pPr lvl="0" indent="0" marL="1270000">
+                  <a:buNone/>
+                </a:pPr>
+                <a:r>
+                  <a:rPr sz="2000" b="1"/>
+                  <a:t>Note</a:t>
+                </a:r>
+              </a:p>
+              <a:p>
+                <a:pPr lvl="0" indent="0" marL="1270000">
+                  <a:buNone/>
+                </a:pPr>
+                <a:r>
+                  <a:rPr sz="2000" b="1"/>
+                  <a:t>✅ The one idea to keep</a:t>
+                </a:r>
+              </a:p>
+              <a:p>
+                <a:pPr lvl="0" indent="0" marL="1270000">
+                  <a:buNone/>
+                </a:pPr>
+                <a:r>
+                  <a:rPr sz="2000"/>
+                  <a:t>A regression line can be fitted to </a:t>
+                </a:r>
+                <a:r>
+                  <a:rPr sz="2000" i="1"/>
+                  <a:t>any</a:t>
+                </a:r>
+                <a:r>
+                  <a:rPr sz="2000"/>
+                  <a:t> two numeric columns. Everything that makes it trustworthy — linearity, independent observations, constant variance, normal residuals — lives in the </a:t>
+                </a:r>
+                <a:r>
+                  <a:rPr sz="2000" b="1"/>
+                  <a:t>diagnostics</a:t>
+                </a:r>
+                <a:r>
+                  <a:rPr sz="2000"/>
+                  <a:t>, not in the p-value.</a:t>
+                </a:r>
+              </a:p>
+            </p:txBody>
+          </p:sp>
+        </mc:Choice>
+      </mc:AlternateContent>
+      <p:sp>
+        <p:nvSpPr>
+          <p:cNvPr id="4" name="Content Placeholder 3"/>
+          <p:cNvSpPr>
+            <a:spLocks noGrp="1"/>
+          </p:cNvSpPr>
+          <p:nvPr>
+            <p:ph idx="2" sz="half"/>
+          </p:nvPr>
+        </p:nvSpPr>
+        <p:spPr/>
+        <p:txBody>
+          <a:bodyPr/>
+          <a:lstStyle/>
+          <a:p>
+            <a:pPr lvl="0" indent="0" marL="1270000">
+              <a:buNone/>
+            </a:pPr>
+            <a:r>
+              <a:rPr sz="2000" b="1"/>
+              <a:t>Note</a:t>
+            </a:r>
+          </a:p>
+          <a:p>
+            <a:pPr lvl="0" indent="0" marL="1270000">
+              <a:buNone/>
+            </a:pPr>
+            <a:r>
+              <a:rPr sz="2000" b="1"/>
+              <a:t>Up next — Multiple Regression</a:t>
+            </a:r>
+          </a:p>
+          <a:p>
+            <a:pPr lvl="0"/>
+            <a:r>
+              <a:rPr sz="2000"/>
+              <a:t>More than one predictor at a time</a:t>
+            </a:r>
+          </a:p>
+          <a:p>
+            <a:pPr lvl="0"/>
+            <a:r>
+              <a:rPr sz="2000"/>
+              <a:t>What happens when predictors are correlated with </a:t>
+            </a:r>
+            <a:r>
+              <a:rPr sz="2000" i="1"/>
+              <a:t>each other</a:t>
+            </a:r>
+          </a:p>
+          <a:p>
+            <a:pPr lvl="0"/>
+            <a:r>
+              <a:rPr sz="2000"/>
+              <a:t>Choosing between competing models</a:t>
+            </a:r>
+          </a:p>
+          <a:p>
+            <a:pPr lvl="0" indent="0" marL="1270000">
+              <a:buNone/>
+            </a:pPr>
+            <a:r>
+              <a:rPr sz="2000" b="1"/>
+              <a:t>Tip</a:t>
+            </a:r>
+          </a:p>
+          <a:p>
+            <a:pPr lvl="0" indent="0" marL="1270000">
+              <a:buNone/>
+            </a:pPr>
+            <a:r>
+              <a:rPr sz="2000" b="1"/>
+              <a:t>🖐 Before next class</a:t>
+            </a:r>
+          </a:p>
+          <a:p>
+            <a:pPr lvl="0" indent="0" marL="1270000">
+              <a:buNone/>
+            </a:pPr>
+            <a:r>
+              <a:rPr sz="2000"/>
+              <a:t>Finish the worksheet, and for your own model write one sentence interpreting the slope </a:t>
+            </a:r>
+            <a:r>
+              <a:rPr sz="2000" b="1"/>
+              <a:t>in the units of the data</a:t>
+            </a:r>
+            <a:r>
+              <a:rPr sz="2000"/>
+              <a:t> — “for every extra X, Y changes by ___” — not just “it was significant.”</a:t>
+            </a:r>
+          </a:p>
+        </p:txBody>
+      </p:sp>
+    </p:spTree>
+  </p:cSld>
+</p:sld>
+</file>
+
+<file path=ppt/slides/slide42.xml><?xml version="1.0" encoding="utf-8"?>
+<p:sld xmlns:a="http://schemas.openxmlformats.org/drawingml/2006/main" xmlns:r="http://schemas.openxmlformats.org/officeDocument/2006/relationships" xmlns:p="http://schemas.openxmlformats.org/presentationml/2006/main">
+  <p:cSld>
+    <p:spTree>
+      <p:nvGrpSpPr>
+        <p:cNvPr id="1" name=""/>
+        <p:cNvGrpSpPr/>
+        <p:nvPr/>
+      </p:nvGrpSpPr>
+      <p:grpSpPr>
+        <a:xfrm>
+          <a:off x="0" y="0"/>
+          <a:ext cx="0" cy="0"/>
+          <a:chOff x="0" y="0"/>
+          <a:chExt cx="0" cy="0"/>
+        </a:xfrm>
+      </p:grpSpPr>
+      <p:sp>
+        <p:nvSpPr>
+          <p:cNvPr id="2" name="Title 1"/>
+          <p:cNvSpPr>
+            <a:spLocks noGrp="1"/>
+          </p:cNvSpPr>
+          <p:nvPr>
+            <p:ph type="title"/>
+          </p:nvPr>
+        </p:nvSpPr>
+        <p:spPr>
+          <a:xfrm>
+            <a:off x="0" y="0"/>
+            <a:ext cx="9144000" cy="582780"/>
+          </a:xfrm>
+        </p:spPr>
+        <p:txBody>
+          <a:bodyPr/>
+          <a:lstStyle/>
+          <a:p>
+            <a:pPr lvl="0" indent="0" marL="0">
+              <a:buNone/>
+            </a:pPr>
+            <a:r>
+              <a:rPr/>
+              <a:t>Getting unstuck</a:t>
+            </a:r>
+          </a:p>
+        </p:txBody>
+      </p:sp>
+      <p:sp>
+        <p:nvSpPr>
+          <p:cNvPr id="3" name="Content Placeholder 2"/>
+          <p:cNvSpPr>
+            <a:spLocks noGrp="1"/>
+          </p:cNvSpPr>
+          <p:nvPr>
+            <p:ph idx="1"/>
+          </p:nvPr>
+        </p:nvSpPr>
+        <p:spPr/>
+        <p:txBody>
+          <a:bodyPr/>
+          <a:lstStyle/>
+          <a:p>
+            <a:pPr lvl="0" indent="0" marL="0">
+              <a:buNone/>
+            </a:pPr>
+            <a:r>
+              <a:rPr/>
+              <a:t>When code breaks — and it will, that is normal:</a:t>
+            </a:r>
+          </a:p>
+          <a:p>
+            <a:pPr lvl="0" indent="-342900" marL="342900">
+              <a:buAutoNum type="arabicPeriod"/>
+            </a:pPr>
+            <a:r>
+              <a:rPr/>
+              <a:t>Read the </a:t>
+            </a:r>
+            <a:r>
+              <a:rPr b="1"/>
+              <a:t>error message</a:t>
+            </a:r>
+            <a:r>
+              <a:rPr/>
+              <a:t> out loud; it usually names the line</a:t>
+            </a:r>
+          </a:p>
+          <a:p>
+            <a:pPr lvl="0" indent="-342900" marL="342900">
+              <a:buAutoNum type="arabicPeriod"/>
+            </a:pPr>
+            <a:r>
+              <a:rPr/>
+              <a:t>Check the usual suspects: is </a:t>
+            </a:r>
+            <a:r>
+              <a:rPr>
+                <a:latin typeface="Courier"/>
+              </a:rPr>
+              <a:t>lm()</a:t>
+            </a:r>
+            <a:r>
+              <a:rPr/>
+              <a:t> written </a:t>
+            </a:r>
+            <a:r>
+              <a:rPr>
+                <a:latin typeface="Courier"/>
+              </a:rPr>
+              <a:t>y ~ x</a:t>
+            </a:r>
+            <a:r>
+              <a:rPr/>
+              <a:t> (response first)? Did you pass </a:t>
+            </a:r>
+            <a:r>
+              <a:rPr>
+                <a:latin typeface="Courier"/>
+              </a:rPr>
+              <a:t>residuals(model)</a:t>
+            </a:r>
+            <a:r>
+              <a:rPr/>
+              <a:t> where a model was expected, or vice versa?</a:t>
+            </a:r>
+          </a:p>
+          <a:p>
+            <a:pPr lvl="0" indent="-342900" marL="342900">
+              <a:buAutoNum type="arabicPeriod"/>
+            </a:pPr>
+            <a:r>
+              <a:rPr>
+                <a:latin typeface="Courier"/>
+              </a:rPr>
+              <a:t>?function_name</a:t>
+            </a:r>
+            <a:r>
+              <a:rPr/>
+              <a:t> opens the help page</a:t>
+            </a:r>
+          </a:p>
+          <a:p>
+            <a:pPr lvl="0" indent="-342900" marL="342900">
+              <a:buAutoNum type="arabicPeriod"/>
+            </a:pPr>
+            <a:r>
+              <a:rPr/>
+              <a:t>Bring the </a:t>
+            </a:r>
+            <a:r>
+              <a:rPr b="1"/>
+              <a:t>exact error</a:t>
+            </a:r>
+            <a:r>
+              <a:rPr/>
+              <a:t> (copy-paste it) to class or office hours</a:t>
+            </a:r>
+          </a:p>
+          <a:p>
+            <a:pPr lvl="0" indent="0" marL="1270000">
+              <a:buNone/>
+            </a:pPr>
+            <a:r>
+              <a:rPr sz="2000" b="1"/>
+              <a:t>Note</a:t>
+            </a:r>
+          </a:p>
+          <a:p>
+            <a:pPr lvl="0" indent="0" marL="1270000">
+              <a:buNone/>
+            </a:pPr>
+            <a:r>
+              <a:rPr sz="2000" b="1"/>
+              <a:t>✅ Key idea</a:t>
+            </a:r>
+          </a:p>
+          <a:p>
+            <a:pPr lvl="0" indent="0" marL="1270000">
+              <a:buNone/>
+            </a:pPr>
+            <a:r>
+              <a:rPr sz="2000"/>
+              <a:t>Every working scientist googles error messages daily. Getting stuck is not failing — it is the job.</a:t>
+            </a:r>
+          </a:p>
+        </p:txBody>
+      </p:sp>
+    </p:spTree>
+  </p:cSld>
+</p:sld>
+</file>
+
 <file path=ppt/slides/slide5.xml><?xml version="1.0" encoding="utf-8"?>
 <p:sld xmlns:a="http://schemas.openxmlformats.org/drawingml/2006/main" xmlns:r="http://schemas.openxmlformats.org/officeDocument/2006/relationships" xmlns:p="http://schemas.openxmlformats.org/presentationml/2006/main">
   <p:cSld>
@@ -10745,7 +11558,15 @@
             <a:pPr lvl="0"/>
             <a:r>
               <a:rPr/>
-              <a:t>Often implies a cause-effect relationship</a:t>
+              <a:t>You </a:t>
+            </a:r>
+            <a:r>
+              <a:rPr i="1"/>
+              <a:t>assume</a:t>
+            </a:r>
+            <a:r>
+              <a:rPr/>
+              <a:t> a direction — X → Y — when you choose which variable goes where</a:t>
             </a:r>
           </a:p>
           <a:p>
@@ -10753,13 +11574,67 @@
             <a:r>
               <a:rPr/>
               <a:t>Produces an equation for prediction, with slope and intercept parameters</a:t>
+            </a:r>
+          </a:p>
+          <a:p>
+            <a:pPr lvl="0" indent="0" marL="1270000">
+              <a:buNone/>
+            </a:pPr>
+            <a:r>
+              <a:rPr sz="2000" b="1"/>
+              <a:t>Warning</a:t>
+            </a:r>
+          </a:p>
+          <a:p>
+            <a:pPr lvl="0" indent="0" marL="1270000">
+              <a:buNone/>
+            </a:pPr>
+            <a:r>
+              <a:rPr sz="2000" b="1"/>
+              <a:t>⚠️ Regression does not earn you causation</a:t>
+            </a:r>
+          </a:p>
+          <a:p>
+            <a:pPr lvl="0" indent="0" marL="1270000">
+              <a:buNone/>
+            </a:pPr>
+            <a:r>
+              <a:rPr sz="2000"/>
+              <a:t>Choosing which variable to call X does not make it a cause. </a:t>
+            </a:r>
+            <a:r>
+              <a:rPr sz="2000">
+                <a:latin typeface="Courier"/>
+              </a:rPr>
+              <a:t>lm(y ~ x)</a:t>
+            </a:r>
+            <a:r>
+              <a:rPr sz="2000"/>
+              <a:t> will fit a slope to any two columns you hand it, including ones with no causal link at all.</a:t>
+            </a:r>
+          </a:p>
+          <a:p>
+            <a:pPr lvl="0" indent="0" marL="1270000">
+              <a:buNone/>
+            </a:pPr>
+            <a:r>
+              <a:rPr sz="2000"/>
+              <a:t>What licenses a causal claim is the </a:t>
+            </a:r>
+            <a:r>
+              <a:rPr sz="2000" b="1"/>
+              <a:t>study design</a:t>
+            </a:r>
+            <a:r>
+              <a:rPr sz="2000"/>
+              <a:t> — manipulation, randomization, controls (Study Design &amp; Sampling) — not the model you fit afterwards.</a:t>
             </a:r>
           </a:p>
         </p:txBody>
       </p:sp>
       <p:pic>
         <p:nvPicPr>
-          <p:cNvPr descr="correlation_linear_models_lecture_files/figure-pptx/unnamed-chunk-3-1.png" id="0" name="Picture 1"/>
+          <p:cNvPr descr="correlation_linear_models_lecture_files/figure-pptx/correlation-linear-models-03-1.png" id="0" name="Picture 1"/>
           <p:cNvPicPr>
             <a:picLocks noGrp="1" noChangeAspect="1"/>
           </p:cNvPicPr>
@@ -11403,7 +12278,7 @@
       </mc:AlternateContent>
       <p:pic>
         <p:nvPicPr>
-          <p:cNvPr descr="correlation_linear_models_lecture_files/figure-pptx/unnamed-chunk-4-1.png" id="0" name="Picture 1"/>
+          <p:cNvPr descr="correlation_linear_models_lecture_files/figure-pptx/correlation-linear-models-04-1.png" id="0" name="Picture 1"/>
           <p:cNvPicPr>
             <a:picLocks noGrp="1" noChangeAspect="1"/>
           </p:cNvPicPr>
